--- a/public/fun/pack/pptx/familypro/가족소개프리미엄_12_아이와함께_누드모카.pptx
+++ b/public/fun/pack/pptx/familypro/가족소개프리미엄_12_아이와함께_누드모카.pptx
@@ -113,12 +113,12 @@
   <p:extLst>
     <p:ext uri="{521415D9-36F7-43E2-AB2F-B90AF26B5E84}">
       <p14:sectionLst xmlns:p14="http://schemas.microsoft.com/office/powerpoint/2010/main">
-        <p14:section name="시작" id="{46F9372C-1B43-49B5-8834-F7589B8F0D52}">
+        <p14:section name="시작" id="{F2BBD04D-C9F8-4F6B-B9BE-F5A62F8A1D0C}">
           <p14:sldIdLst>
             <p14:sldId id="256"/>
           </p14:sldIdLst>
         </p14:section>
-        <p14:section name="본문" id="{3543A17F-BBBF-43AE-989A-788624CFFB2B}">
+        <p14:section name="본문" id="{93E4EDA6-9060-468B-94B4-7E1F8AD40197}">
           <p14:sldIdLst>
             <p14:sldId id="257"/>
             <p14:sldId id="258"/>
@@ -127,7 +127,7 @@
             <p14:sldId id="261"/>
           </p14:sldIdLst>
         </p14:section>
-        <p14:section name="마무리" id="{F2C97338-B24A-4C19-8425-D42ACFA43966}">
+        <p14:section name="마무리" id="{6CBF0B9F-AC6B-4A3A-9D68-26A4603466A8}">
           <p14:sldIdLst>
             <p14:sldId id="262"/>
           </p14:sldIdLst>
@@ -1482,7 +1482,7 @@
             </a:lvl1pPr>
           </a:lstStyle>
           <a:p>
-            <a:fld id="{84C9338D-7671-463D-A1C8-9E89310DAB3C}" type="slidenum">
+            <a:fld id="{BEB64BAA-7F88-4D41-BB44-3A095027328E}" type="slidenum">
               <a:rPr lang="en-US"/>
               <a:t>‹#›</a:t>
             </a:fld>
@@ -2155,7 +2155,7 @@
             </a:lvl1pPr>
           </a:lstStyle>
           <a:p>
-            <a:fld id="{73F61F44-B535-4292-B9FF-66C0F3D60DA3}" type="slidenum">
+            <a:fld id="{8FDBA641-ACF6-403F-A2A2-6A974122E244}" type="slidenum">
               <a:rPr lang="en-US"/>
               <a:t>‹#›</a:t>
             </a:fld>
@@ -2843,7 +2843,7 @@
             </a:lvl1pPr>
           </a:lstStyle>
           <a:p>
-            <a:fld id="{2864EA30-0FB3-455E-B4AB-E8576DCBC797}" type="slidenum">
+            <a:fld id="{95B9E0A4-BB89-48E3-8F02-2E64398DB359}" type="slidenum">
               <a:rPr lang="en-US"/>
               <a:t>‹#›</a:t>
             </a:fld>
@@ -3754,7 +3754,7 @@
           <a:p>
             <a:r>
               <a:rPr lang="ko-KR"/>
-              <a:t>아이와 함께 · 0000. 00. 00</a:t>
+              <a:t>아이와 함께 · 날짜 입력</a:t>
             </a:r>
           </a:p>
         </p:txBody>
@@ -4139,7 +4139,7 @@
           <a:bodyPr/>
           <a:lstStyle/>
           <a:p>
-            <a:fld id="{3250D1F0-D146-43EF-AC23-EC83CDED8B6F}" type="slidenum">
+            <a:fld id="{D85A37B7-9E3E-4B21-9EE5-74058CDAAF45}" type="slidenum">
               <a:rPr lang="en-US"/>
               <a:t>‹#›</a:t>
             </a:fld>
@@ -4855,7 +4855,7 @@
           <a:bodyPr/>
           <a:lstStyle/>
           <a:p>
-            <a:fld id="{CDAD622C-94E6-4DA0-89D5-BC1DC247D681}" type="slidenum">
+            <a:fld id="{EC61BBD6-3761-4FA9-98E8-59957CD6DCAF}" type="slidenum">
               <a:rPr lang="en-US"/>
               <a:t>‹#›</a:t>
             </a:fld>
@@ -5830,7 +5830,7 @@
           <a:bodyPr/>
           <a:lstStyle/>
           <a:p>
-            <a:fld id="{13C56B8E-3166-486C-BFBB-131C61C3A47E}" type="slidenum">
+            <a:fld id="{AB4A401F-3E41-45CF-83E8-4502D8C1689E}" type="slidenum">
               <a:rPr lang="en-US"/>
               <a:t>‹#›</a:t>
             </a:fld>
@@ -7079,7 +7079,7 @@
           <a:bodyPr/>
           <a:lstStyle/>
           <a:p>
-            <a:fld id="{E93430A0-D950-4CF6-B0A9-8ACB1FC0EDC7}" type="slidenum">
+            <a:fld id="{AA5E8DD0-ABB2-4BE1-9B6D-5A2CD8FF2001}" type="slidenum">
               <a:rPr lang="en-US"/>
               <a:t>‹#›</a:t>
             </a:fld>
@@ -7167,7 +7167,7 @@
           <a:bodyPr/>
           <a:lstStyle/>
           <a:p>
-            <a:fld id="{146B8CF0-4A79-4BF0-94A7-0F0A00A2D4CE}" type="slidenum">
+            <a:fld id="{EFD24B61-D4A6-4877-8A79-BE11F4EF11EA}" type="slidenum">
               <a:rPr lang="en-US"/>
               <a:t>‹#›</a:t>
             </a:fld>
